--- a/Proyecto integrador/Cuadro comparativo/Actividad 5.1 Cuadro comparativo de diagramas_RobertoCahuare_SIM_5ISCM.pptx
+++ b/Proyecto integrador/Cuadro comparativo/Actividad 5.1 Cuadro comparativo de diagramas_RobertoCahuare_SIM_5ISCM.pptx
@@ -5455,12 +5455,16 @@
           <a:p>
             <a:pPr algn="ctr"/>
             <a:r>
-              <a:rPr lang="es-MX" sz="2800" b="1" dirty="0">
+              <a:rPr lang="es-MX" sz="2800" b="1" dirty="0" smtClean="0">
                 <a:latin typeface="Arial" panose="020B0604020202020204" pitchFamily="34" charset="0"/>
                 <a:cs typeface="Arial" panose="020B0604020202020204" pitchFamily="34" charset="0"/>
               </a:rPr>
-              <a:t>BIBLIOGRAFIA</a:t>
-            </a:r>
+              <a:t>FUENTES DE INFORMACIÓN</a:t>
+            </a:r>
+            <a:endParaRPr lang="es-MX" sz="2800" b="1" dirty="0">
+              <a:latin typeface="Arial" panose="020B0604020202020204" pitchFamily="34" charset="0"/>
+              <a:cs typeface="Arial" panose="020B0604020202020204" pitchFamily="34" charset="0"/>
+            </a:endParaRPr>
           </a:p>
         </p:txBody>
       </p:sp>
